--- a/COURSE MATERIALS/Module4 _CSE2503.pptx
+++ b/COURSE MATERIALS/Module4 _CSE2503.pptx
@@ -2632,7 +2632,7 @@
             <a:fld id="{1D5163DD-12C9-4B8E-91F3-BECE4B548A1F}" type="datetimeFigureOut">
               <a:rPr lang="en-US" smtClean="0"/>
               <a:pPr/>
-              <a:t>4/13/2026</a:t>
+              <a:t>4/20/2026</a:t>
             </a:fld>
             <a:endParaRPr lang="en-US"/>
           </a:p>
@@ -2811,7 +2811,7 @@
               <a:pPr>
                 <a:defRPr/>
               </a:pPr>
-              <a:t>4/13/2026</a:t>
+              <a:t>4/20/2026</a:t>
             </a:fld>
             <a:endParaRPr lang="en-US"/>
           </a:p>
@@ -3379,7 +3379,7 @@
               <a:pPr>
                 <a:defRPr/>
               </a:pPr>
-              <a:t>4/13/2026</a:t>
+              <a:t>4/20/2026</a:t>
             </a:fld>
             <a:endParaRPr lang="en-US"/>
           </a:p>
@@ -3576,7 +3576,7 @@
               <a:pPr>
                 <a:defRPr/>
               </a:pPr>
-              <a:t>4/13/2026</a:t>
+              <a:t>4/20/2026</a:t>
             </a:fld>
             <a:endParaRPr lang="en-US"/>
           </a:p>
@@ -3783,7 +3783,7 @@
               <a:pPr>
                 <a:defRPr/>
               </a:pPr>
-              <a:t>4/13/2026</a:t>
+              <a:t>4/20/2026</a:t>
             </a:fld>
             <a:endParaRPr lang="en-US"/>
           </a:p>
@@ -3980,7 +3980,7 @@
               <a:pPr>
                 <a:defRPr/>
               </a:pPr>
-              <a:t>4/13/2026</a:t>
+              <a:t>4/20/2026</a:t>
             </a:fld>
             <a:endParaRPr lang="en-US"/>
           </a:p>
@@ -4253,7 +4253,7 @@
               <a:pPr>
                 <a:defRPr/>
               </a:pPr>
-              <a:t>4/13/2026</a:t>
+              <a:t>4/20/2026</a:t>
             </a:fld>
             <a:endParaRPr lang="en-US"/>
           </a:p>
@@ -4512,7 +4512,7 @@
               <a:pPr>
                 <a:defRPr/>
               </a:pPr>
-              <a:t>4/13/2026</a:t>
+              <a:t>4/20/2026</a:t>
             </a:fld>
             <a:endParaRPr lang="en-US"/>
           </a:p>
@@ -4906,7 +4906,7 @@
               <a:pPr>
                 <a:defRPr/>
               </a:pPr>
-              <a:t>4/13/2026</a:t>
+              <a:t>4/20/2026</a:t>
             </a:fld>
             <a:endParaRPr lang="en-US"/>
           </a:p>
@@ -5051,7 +5051,7 @@
               <a:pPr>
                 <a:defRPr/>
               </a:pPr>
-              <a:t>4/13/2026</a:t>
+              <a:t>4/20/2026</a:t>
             </a:fld>
             <a:endParaRPr lang="en-US"/>
           </a:p>
@@ -5173,7 +5173,7 @@
               <a:pPr>
                 <a:defRPr/>
               </a:pPr>
-              <a:t>4/13/2026</a:t>
+              <a:t>4/20/2026</a:t>
             </a:fld>
             <a:endParaRPr lang="en-US"/>
           </a:p>
@@ -5477,7 +5477,7 @@
               <a:pPr>
                 <a:defRPr/>
               </a:pPr>
-              <a:t>4/13/2026</a:t>
+              <a:t>4/20/2026</a:t>
             </a:fld>
             <a:endParaRPr lang="en-US"/>
           </a:p>
@@ -5764,7 +5764,7 @@
               <a:pPr>
                 <a:defRPr/>
               </a:pPr>
-              <a:t>4/13/2026</a:t>
+              <a:t>4/20/2026</a:t>
             </a:fld>
             <a:endParaRPr lang="en-US"/>
           </a:p>
@@ -6049,7 +6049,7 @@
               <a:pPr>
                 <a:defRPr/>
               </a:pPr>
-              <a:t>4/13/2026</a:t>
+              <a:t>4/20/2026</a:t>
             </a:fld>
             <a:endParaRPr lang="en-US"/>
           </a:p>
@@ -13153,10 +13153,6 @@
               </a:rPr>
               <a:t>}  </a:t>
             </a:r>
-            <a:endParaRPr lang="en-US" sz="2000" dirty="0" smtClean="0">
-              <a:latin typeface="Cambria" panose="02040503050406030204" pitchFamily="18" charset="0"/>
-              <a:ea typeface="Cambria" panose="02040503050406030204" pitchFamily="18" charset="0"/>
-            </a:endParaRPr>
           </a:p>
           <a:p>
             <a:pPr>
@@ -13252,10 +13248,6 @@
               </a:rPr>
               <a:t> width=10;</a:t>
             </a:r>
-            <a:endParaRPr lang="en-US" sz="2000" dirty="0" smtClean="0">
-              <a:latin typeface="Cambria" panose="02040503050406030204" pitchFamily="18" charset="0"/>
-              <a:ea typeface="Cambria" panose="02040503050406030204" pitchFamily="18" charset="0"/>
-            </a:endParaRPr>
           </a:p>
           <a:p>
             <a:pPr>
@@ -13450,33 +13442,22 @@
                 <a:latin typeface="Cambria" panose="02040503050406030204" pitchFamily="18" charset="0"/>
                 <a:ea typeface="Cambria" panose="02040503050406030204" pitchFamily="18" charset="0"/>
               </a:rPr>
-              <a:t>  </a:t>
+              <a:t>      </a:t>
+            </a:r>
+            <a:r>
+              <a:rPr lang="en-US" sz="2000" dirty="0" err="1" smtClean="0">
+                <a:latin typeface="Cambria" panose="02040503050406030204" pitchFamily="18" charset="0"/>
+                <a:ea typeface="Cambria" panose="02040503050406030204" pitchFamily="18" charset="0"/>
+              </a:rPr>
+              <a:t>Drawable</a:t>
             </a:r>
             <a:r>
               <a:rPr lang="en-US" sz="2000" dirty="0" smtClean="0">
                 <a:latin typeface="Cambria" panose="02040503050406030204" pitchFamily="18" charset="0"/>
                 <a:ea typeface="Cambria" panose="02040503050406030204" pitchFamily="18" charset="0"/>
               </a:rPr>
-              <a:t>    </a:t>
-            </a:r>
-            <a:r>
-              <a:rPr lang="en-US" sz="2000" dirty="0" err="1" smtClean="0">
-                <a:latin typeface="Cambria" panose="02040503050406030204" pitchFamily="18" charset="0"/>
-                <a:ea typeface="Cambria" panose="02040503050406030204" pitchFamily="18" charset="0"/>
-              </a:rPr>
-              <a:t>Drawable</a:t>
-            </a:r>
-            <a:r>
-              <a:rPr lang="en-US" sz="2000" dirty="0" smtClean="0">
-                <a:latin typeface="Cambria" panose="02040503050406030204" pitchFamily="18" charset="0"/>
-                <a:ea typeface="Cambria" panose="02040503050406030204" pitchFamily="18" charset="0"/>
-              </a:rPr>
               <a:t> d=new Drawing();</a:t>
             </a:r>
-            <a:endParaRPr lang="en-US" sz="2000" dirty="0" smtClean="0">
-              <a:latin typeface="Cambria" panose="02040503050406030204" pitchFamily="18" charset="0"/>
-              <a:ea typeface="Cambria" panose="02040503050406030204" pitchFamily="18" charset="0"/>
-            </a:endParaRPr>
           </a:p>
           <a:p>
             <a:pPr>
@@ -26804,6 +26785,10 @@
               </a:rPr>
               <a:t> main(String args[]){  </a:t>
             </a:r>
+            <a:endParaRPr lang="en-US" sz="1800" dirty="0" smtClean="0">
+              <a:latin typeface="Cambria" panose="02040503050406030204" pitchFamily="18" charset="0"/>
+              <a:ea typeface="Cambria" panose="02040503050406030204" pitchFamily="18" charset="0"/>
+            </a:endParaRPr>
           </a:p>
           <a:p>
             <a:pPr algn="just">
@@ -26817,36 +26802,33 @@
                 <a:latin typeface="Cambria" panose="02040503050406030204" pitchFamily="18" charset="0"/>
                 <a:ea typeface="Cambria" panose="02040503050406030204" pitchFamily="18" charset="0"/>
               </a:rPr>
-              <a:t>        list1.add(</a:t>
-            </a:r>
-            <a:r>
-              <a:rPr lang="en-US" sz="1800" b="1" dirty="0">
-                <a:latin typeface="Cambria" panose="02040503050406030204" pitchFamily="18" charset="0"/>
-                <a:ea typeface="Cambria" panose="02040503050406030204" pitchFamily="18" charset="0"/>
-              </a:rPr>
-              <a:t>new</a:t>
-            </a:r>
-            <a:r>
-              <a:rPr lang="en-US" sz="1800" dirty="0">
-                <a:latin typeface="Cambria" panose="02040503050406030204" pitchFamily="18" charset="0"/>
-                <a:ea typeface="Cambria" panose="02040503050406030204" pitchFamily="18" charset="0"/>
-              </a:rPr>
-              <a:t>List&lt;Rectangle&gt; list1=</a:t>
-            </a:r>
-            <a:r>
-              <a:rPr lang="en-US" sz="1800" b="1" dirty="0">
-                <a:latin typeface="Cambria" panose="02040503050406030204" pitchFamily="18" charset="0"/>
-                <a:ea typeface="Cambria" panose="02040503050406030204" pitchFamily="18" charset="0"/>
-              </a:rPr>
-              <a:t>new</a:t>
-            </a:r>
-            <a:r>
-              <a:rPr lang="en-US" sz="1800" dirty="0">
-                <a:latin typeface="Cambria" panose="02040503050406030204" pitchFamily="18" charset="0"/>
-                <a:ea typeface="Cambria" panose="02040503050406030204" pitchFamily="18" charset="0"/>
-              </a:rPr>
-              <a:t> ArrayList&lt;Rectangle&gt;();  </a:t>
-            </a:r>
+              <a:t> </a:t>
+            </a:r>
+            <a:r>
+              <a:rPr lang="en-US" sz="1800" dirty="0" smtClean="0">
+                <a:latin typeface="Cambria" panose="02040503050406030204" pitchFamily="18" charset="0"/>
+                <a:ea typeface="Cambria" panose="02040503050406030204" pitchFamily="18" charset="0"/>
+              </a:rPr>
+              <a:t>    List&lt;Rectangle&gt; list1=new </a:t>
+            </a:r>
+            <a:r>
+              <a:rPr lang="en-US" sz="1800" dirty="0" err="1" smtClean="0">
+                <a:latin typeface="Cambria" panose="02040503050406030204" pitchFamily="18" charset="0"/>
+                <a:ea typeface="Cambria" panose="02040503050406030204" pitchFamily="18" charset="0"/>
+              </a:rPr>
+              <a:t>ArrayList</a:t>
+            </a:r>
+            <a:r>
+              <a:rPr lang="en-US" sz="1800" dirty="0" smtClean="0">
+                <a:latin typeface="Cambria" panose="02040503050406030204" pitchFamily="18" charset="0"/>
+                <a:ea typeface="Cambria" panose="02040503050406030204" pitchFamily="18" charset="0"/>
+              </a:rPr>
+              <a:t>&lt;Rectangle&gt;();</a:t>
+            </a:r>
+            <a:endParaRPr lang="en-US" sz="1800" dirty="0">
+              <a:latin typeface="Cambria" panose="02040503050406030204" pitchFamily="18" charset="0"/>
+              <a:ea typeface="Cambria" panose="02040503050406030204" pitchFamily="18" charset="0"/>
+            </a:endParaRPr>
           </a:p>
           <a:p>
             <a:pPr algn="just">
@@ -26860,7 +26842,21 @@
                 <a:latin typeface="Cambria" panose="02040503050406030204" pitchFamily="18" charset="0"/>
                 <a:ea typeface="Cambria" panose="02040503050406030204" pitchFamily="18" charset="0"/>
               </a:rPr>
-              <a:t>        Rectangle());  </a:t>
+              <a:t>        </a:t>
+            </a:r>
+            <a:r>
+              <a:rPr lang="en-US" sz="1800" dirty="0" smtClean="0">
+                <a:latin typeface="Cambria" panose="02040503050406030204" pitchFamily="18" charset="0"/>
+                <a:ea typeface="Cambria" panose="02040503050406030204" pitchFamily="18" charset="0"/>
+              </a:rPr>
+              <a:t>list1.add(new Rectangle());</a:t>
+            </a:r>
+            <a:r>
+              <a:rPr lang="en-US" sz="1800" dirty="0">
+                <a:latin typeface="Cambria" panose="02040503050406030204" pitchFamily="18" charset="0"/>
+                <a:ea typeface="Cambria" panose="02040503050406030204" pitchFamily="18" charset="0"/>
+              </a:rPr>
+              <a:t> </a:t>
             </a:r>
           </a:p>
           <a:p>
@@ -26875,7 +26871,28 @@
                 <a:latin typeface="Cambria" panose="02040503050406030204" pitchFamily="18" charset="0"/>
                 <a:ea typeface="Cambria" panose="02040503050406030204" pitchFamily="18" charset="0"/>
               </a:rPr>
-              <a:t>        List&lt;Circle&gt; list2=</a:t>
+              <a:t> </a:t>
+            </a:r>
+            <a:r>
+              <a:rPr lang="en-US" sz="1800">
+                <a:latin typeface="Cambria" panose="02040503050406030204" pitchFamily="18" charset="0"/>
+                <a:ea typeface="Cambria" panose="02040503050406030204" pitchFamily="18" charset="0"/>
+              </a:rPr>
+              <a:t> </a:t>
+            </a:r>
+            <a:r>
+              <a:rPr lang="en-US" sz="1800" smtClean="0">
+                <a:latin typeface="Cambria" panose="02040503050406030204" pitchFamily="18" charset="0"/>
+                <a:ea typeface="Cambria" panose="02040503050406030204" pitchFamily="18" charset="0"/>
+              </a:rPr>
+              <a:t>     List&lt;Circle</a:t>
+            </a:r>
+            <a:r>
+              <a:rPr lang="en-US" sz="1800" dirty="0">
+                <a:latin typeface="Cambria" panose="02040503050406030204" pitchFamily="18" charset="0"/>
+                <a:ea typeface="Cambria" panose="02040503050406030204" pitchFamily="18" charset="0"/>
+              </a:rPr>
+              <a:t>&gt; list2=</a:t>
             </a:r>
             <a:r>
               <a:rPr lang="en-US" sz="1800" b="1" dirty="0">
@@ -38035,6 +38052,12 @@
 </file>
 
 <file path=customXml/item1.xml><?xml version="1.0" encoding="utf-8"?>
+<p:properties xmlns:p="http://schemas.microsoft.com/office/2006/metadata/properties" xmlns:xsi="http://www.w3.org/2001/XMLSchema-instance" xmlns:pc="http://schemas.microsoft.com/office/infopath/2007/PartnerControls">
+  <documentManagement/>
+</p:properties>
+</file>
+
+<file path=customXml/item2.xml><?xml version="1.0" encoding="utf-8"?>
 <?mso-contentType ?>
 <FormTemplates xmlns="http://schemas.microsoft.com/sharepoint/v3/contenttype/forms">
   <Display>DocumentLibraryForm</Display>
@@ -38043,7 +38066,7 @@
 </FormTemplates>
 </file>
 
-<file path=customXml/item2.xml><?xml version="1.0" encoding="utf-8"?>
+<file path=customXml/item3.xml><?xml version="1.0" encoding="utf-8"?>
 <ct:contentTypeSchema xmlns:ct="http://schemas.microsoft.com/office/2006/metadata/contentType" xmlns:ma="http://schemas.microsoft.com/office/2006/metadata/properties/metaAttributes" ct:_="" ma:_="" ma:contentTypeName="Document" ma:contentTypeID="0x0101004C1DE35D32F8A9489F9CB065DAD17BDC" ma:contentTypeVersion="4" ma:contentTypeDescription="Create a new document." ma:contentTypeScope="" ma:versionID="06e5a418d8fb9cc4997eb20698978736">
   <xsd:schema xmlns:xsd="http://www.w3.org/2001/XMLSchema" xmlns:xs="http://www.w3.org/2001/XMLSchema" xmlns:p="http://schemas.microsoft.com/office/2006/metadata/properties" xmlns:ns2="be89791f-b053-47b8-996c-5f8fd4f0316a" targetNamespace="http://schemas.microsoft.com/office/2006/metadata/properties" ma:root="true" ma:fieldsID="2d870f90b3838ddefc78dcad9d8bd211" ns2:_="">
     <xsd:import namespace="be89791f-b053-47b8-996c-5f8fd4f0316a"/>
@@ -38187,13 +38210,23 @@
 </ct:contentTypeSchema>
 </file>
 
-<file path=customXml/item3.xml><?xml version="1.0" encoding="utf-8"?>
-<p:properties xmlns:p="http://schemas.microsoft.com/office/2006/metadata/properties" xmlns:xsi="http://www.w3.org/2001/XMLSchema-instance" xmlns:pc="http://schemas.microsoft.com/office/infopath/2007/PartnerControls">
-  <documentManagement/>
-</p:properties>
+<file path=customXml/itemProps1.xml><?xml version="1.0" encoding="utf-8"?>
+<ds:datastoreItem xmlns:ds="http://schemas.openxmlformats.org/officeDocument/2006/customXml" ds:itemID="{57959F8B-570F-4C27-AAAE-3479F7738CA0}">
+  <ds:schemaRefs>
+    <ds:schemaRef ds:uri="http://purl.org/dc/elements/1.1/"/>
+    <ds:schemaRef ds:uri="http://schemas.microsoft.com/office/2006/metadata/properties"/>
+    <ds:schemaRef ds:uri="be89791f-b053-47b8-996c-5f8fd4f0316a"/>
+    <ds:schemaRef ds:uri="http://purl.org/dc/terms/"/>
+    <ds:schemaRef ds:uri="http://schemas.openxmlformats.org/package/2006/metadata/core-properties"/>
+    <ds:schemaRef ds:uri="http://schemas.microsoft.com/office/2006/documentManagement/types"/>
+    <ds:schemaRef ds:uri="http://schemas.microsoft.com/office/infopath/2007/PartnerControls"/>
+    <ds:schemaRef ds:uri="http://www.w3.org/XML/1998/namespace"/>
+    <ds:schemaRef ds:uri="http://purl.org/dc/dcmitype/"/>
+  </ds:schemaRefs>
+</ds:datastoreItem>
 </file>
 
-<file path=customXml/itemProps1.xml><?xml version="1.0" encoding="utf-8"?>
+<file path=customXml/itemProps2.xml><?xml version="1.0" encoding="utf-8"?>
 <ds:datastoreItem xmlns:ds="http://schemas.openxmlformats.org/officeDocument/2006/customXml" ds:itemID="{2A9E6BEA-9628-4C6B-A0A5-33243618EDD1}">
   <ds:schemaRefs>
     <ds:schemaRef ds:uri="http://schemas.microsoft.com/sharepoint/v3/contenttype/forms"/>
@@ -38201,7 +38234,7 @@
 </ds:datastoreItem>
 </file>
 
-<file path=customXml/itemProps2.xml><?xml version="1.0" encoding="utf-8"?>
+<file path=customXml/itemProps3.xml><?xml version="1.0" encoding="utf-8"?>
 <ds:datastoreItem xmlns:ds="http://schemas.openxmlformats.org/officeDocument/2006/customXml" ds:itemID="{EC34C8CD-81C9-4245-A407-93F6E6AEF6C6}">
   <ds:schemaRefs>
     <ds:schemaRef ds:uri="http://schemas.microsoft.com/office/2006/metadata/contentType"/>
@@ -38217,20 +38250,4 @@
     <ds:schemaRef ds:uri="http://schemas.microsoft.com/internal/obd"/>
   </ds:schemaRefs>
 </ds:datastoreItem>
-</file>
-
-<file path=customXml/itemProps3.xml><?xml version="1.0" encoding="utf-8"?>
-<ds:datastoreItem xmlns:ds="http://schemas.openxmlformats.org/officeDocument/2006/customXml" ds:itemID="{57959F8B-570F-4C27-AAAE-3479F7738CA0}">
-  <ds:schemaRefs>
-    <ds:schemaRef ds:uri="http://purl.org/dc/elements/1.1/"/>
-    <ds:schemaRef ds:uri="http://schemas.microsoft.com/office/2006/metadata/properties"/>
-    <ds:schemaRef ds:uri="be89791f-b053-47b8-996c-5f8fd4f0316a"/>
-    <ds:schemaRef ds:uri="http://purl.org/dc/terms/"/>
-    <ds:schemaRef ds:uri="http://schemas.openxmlformats.org/package/2006/metadata/core-properties"/>
-    <ds:schemaRef ds:uri="http://schemas.microsoft.com/office/2006/documentManagement/types"/>
-    <ds:schemaRef ds:uri="http://schemas.microsoft.com/office/infopath/2007/PartnerControls"/>
-    <ds:schemaRef ds:uri="http://www.w3.org/XML/1998/namespace"/>
-    <ds:schemaRef ds:uri="http://purl.org/dc/dcmitype/"/>
-  </ds:schemaRefs>
-</ds:datastoreItem>
 </file>